--- a/diagrams/docs-architecture-diagrams-new.pptx
+++ b/diagrams/docs-architecture-diagrams-new.pptx
@@ -204,7 +204,7 @@
           <a:p>
             <a:fld id="{1BD4F795-4516-48C9-BD51-F3FEBCEDA59D}" type="datetimeFigureOut">
               <a:rPr lang="en-US" smtClean="0"/>
-              <a:t>5/14/26</a:t>
+              <a:t>5/14/2026</a:t>
             </a:fld>
             <a:endParaRPr lang="en-US"/>
           </a:p>
@@ -1634,7 +1634,7 @@
           <a:p>
             <a:fld id="{29D0D232-2A0D-435C-9000-4A67594DD2E9}" type="datetimeFigureOut">
               <a:rPr lang="en-US" smtClean="0"/>
-              <a:t>5/14/26</a:t>
+              <a:t>5/14/2026</a:t>
             </a:fld>
             <a:endParaRPr lang="en-US"/>
           </a:p>
@@ -1832,7 +1832,7 @@
           <a:p>
             <a:fld id="{29D0D232-2A0D-435C-9000-4A67594DD2E9}" type="datetimeFigureOut">
               <a:rPr lang="en-US" smtClean="0"/>
-              <a:t>5/14/26</a:t>
+              <a:t>5/14/2026</a:t>
             </a:fld>
             <a:endParaRPr lang="en-US"/>
           </a:p>
@@ -2040,7 +2040,7 @@
           <a:p>
             <a:fld id="{29D0D232-2A0D-435C-9000-4A67594DD2E9}" type="datetimeFigureOut">
               <a:rPr lang="en-US" smtClean="0"/>
-              <a:t>5/14/26</a:t>
+              <a:t>5/14/2026</a:t>
             </a:fld>
             <a:endParaRPr lang="en-US"/>
           </a:p>
@@ -2597,7 +2597,7 @@
           <a:p>
             <a:fld id="{29D0D232-2A0D-435C-9000-4A67594DD2E9}" type="datetimeFigureOut">
               <a:rPr lang="en-US" smtClean="0"/>
-              <a:t>5/14/26</a:t>
+              <a:t>5/14/2026</a:t>
             </a:fld>
             <a:endParaRPr lang="en-US"/>
           </a:p>
@@ -2872,7 +2872,7 @@
           <a:p>
             <a:fld id="{29D0D232-2A0D-435C-9000-4A67594DD2E9}" type="datetimeFigureOut">
               <a:rPr lang="en-US" smtClean="0"/>
-              <a:t>5/14/26</a:t>
+              <a:t>5/14/2026</a:t>
             </a:fld>
             <a:endParaRPr lang="en-US"/>
           </a:p>
@@ -3137,7 +3137,7 @@
           <a:p>
             <a:fld id="{29D0D232-2A0D-435C-9000-4A67594DD2E9}" type="datetimeFigureOut">
               <a:rPr lang="en-US" smtClean="0"/>
-              <a:t>5/14/26</a:t>
+              <a:t>5/14/2026</a:t>
             </a:fld>
             <a:endParaRPr lang="en-US"/>
           </a:p>
@@ -3549,7 +3549,7 @@
           <a:p>
             <a:fld id="{29D0D232-2A0D-435C-9000-4A67594DD2E9}" type="datetimeFigureOut">
               <a:rPr lang="en-US" smtClean="0"/>
-              <a:t>5/14/26</a:t>
+              <a:t>5/14/2026</a:t>
             </a:fld>
             <a:endParaRPr lang="en-US"/>
           </a:p>
@@ -3690,7 +3690,7 @@
           <a:p>
             <a:fld id="{29D0D232-2A0D-435C-9000-4A67594DD2E9}" type="datetimeFigureOut">
               <a:rPr lang="en-US" smtClean="0"/>
-              <a:t>5/14/26</a:t>
+              <a:t>5/14/2026</a:t>
             </a:fld>
             <a:endParaRPr lang="en-US"/>
           </a:p>
@@ -3803,7 +3803,7 @@
           <a:p>
             <a:fld id="{29D0D232-2A0D-435C-9000-4A67594DD2E9}" type="datetimeFigureOut">
               <a:rPr lang="en-US" smtClean="0"/>
-              <a:t>5/14/26</a:t>
+              <a:t>5/14/2026</a:t>
             </a:fld>
             <a:endParaRPr lang="en-US"/>
           </a:p>
@@ -4114,7 +4114,7 @@
           <a:p>
             <a:fld id="{29D0D232-2A0D-435C-9000-4A67594DD2E9}" type="datetimeFigureOut">
               <a:rPr lang="en-US" smtClean="0"/>
-              <a:t>5/14/26</a:t>
+              <a:t>5/14/2026</a:t>
             </a:fld>
             <a:endParaRPr lang="en-US"/>
           </a:p>
@@ -4402,7 +4402,7 @@
           <a:p>
             <a:fld id="{29D0D232-2A0D-435C-9000-4A67594DD2E9}" type="datetimeFigureOut">
               <a:rPr lang="en-US" smtClean="0"/>
-              <a:t>5/14/26</a:t>
+              <a:t>5/14/2026</a:t>
             </a:fld>
             <a:endParaRPr lang="en-US"/>
           </a:p>
@@ -4643,7 +4643,7 @@
           <a:p>
             <a:fld id="{29D0D232-2A0D-435C-9000-4A67594DD2E9}" type="datetimeFigureOut">
               <a:rPr lang="en-US" smtClean="0"/>
-              <a:t>5/14/26</a:t>
+              <a:t>5/14/2026</a:t>
             </a:fld>
             <a:endParaRPr lang="en-US"/>
           </a:p>
@@ -6532,7 +6532,7 @@
                 <a:latin typeface="Helvetica" panose="020B0604020202020204"/>
                 <a:cs typeface="Helvetica" panose="020B0604020202020204"/>
               </a:rPr>
-              <a:t>Workflow Dashboard</a:t>
+              <a:t>Workflows Dashboard</a:t>
             </a:r>
           </a:p>
         </p:txBody>
@@ -8304,7 +8304,7 @@
                 <a:latin typeface="Helvetica" panose="020B0604020202020204"/>
                 <a:cs typeface="Helvetica" panose="020B0604020202020204"/>
               </a:rPr>
-              <a:t>Liveness Tracking</a:t>
+              <a:t>Distributed Recovery</a:t>
             </a:r>
             <a:endParaRPr sz="1600" dirty="0">
               <a:latin typeface="Helvetica" panose="020B0604020202020204"/>
